--- a/chat-application_仕様書.pptx
+++ b/chat-application_仕様書.pptx
@@ -261,7 +261,7 @@
           <a:p>
             <a:fld id="{F07E596A-3FA7-46C0-A5AB-AD11BEA7438E}" type="datetimeFigureOut">
               <a:rPr kumimoji="1" lang="ja-JP" altLang="en-US" smtClean="0"/>
-              <a:t>2026/5/20</a:t>
+              <a:t>2026/7/8</a:t>
             </a:fld>
             <a:endParaRPr kumimoji="1" lang="ja-JP" altLang="en-US"/>
           </a:p>
@@ -491,7 +491,7 @@
           <a:p>
             <a:fld id="{F07E596A-3FA7-46C0-A5AB-AD11BEA7438E}" type="datetimeFigureOut">
               <a:rPr kumimoji="1" lang="ja-JP" altLang="en-US" smtClean="0"/>
-              <a:t>2026/5/20</a:t>
+              <a:t>2026/7/8</a:t>
             </a:fld>
             <a:endParaRPr kumimoji="1" lang="ja-JP" altLang="en-US"/>
           </a:p>
@@ -731,7 +731,7 @@
           <a:p>
             <a:fld id="{F07E596A-3FA7-46C0-A5AB-AD11BEA7438E}" type="datetimeFigureOut">
               <a:rPr kumimoji="1" lang="ja-JP" altLang="en-US" smtClean="0"/>
-              <a:t>2026/5/20</a:t>
+              <a:t>2026/7/8</a:t>
             </a:fld>
             <a:endParaRPr kumimoji="1" lang="ja-JP" altLang="en-US"/>
           </a:p>
@@ -961,7 +961,7 @@
           <a:p>
             <a:fld id="{F07E596A-3FA7-46C0-A5AB-AD11BEA7438E}" type="datetimeFigureOut">
               <a:rPr kumimoji="1" lang="ja-JP" altLang="en-US" smtClean="0"/>
-              <a:t>2026/5/20</a:t>
+              <a:t>2026/7/8</a:t>
             </a:fld>
             <a:endParaRPr kumimoji="1" lang="ja-JP" altLang="en-US"/>
           </a:p>
@@ -1236,7 +1236,7 @@
           <a:p>
             <a:fld id="{F07E596A-3FA7-46C0-A5AB-AD11BEA7438E}" type="datetimeFigureOut">
               <a:rPr kumimoji="1" lang="ja-JP" altLang="en-US" smtClean="0"/>
-              <a:t>2026/5/20</a:t>
+              <a:t>2026/7/8</a:t>
             </a:fld>
             <a:endParaRPr kumimoji="1" lang="ja-JP" altLang="en-US"/>
           </a:p>
@@ -1565,7 +1565,7 @@
           <a:p>
             <a:fld id="{F07E596A-3FA7-46C0-A5AB-AD11BEA7438E}" type="datetimeFigureOut">
               <a:rPr kumimoji="1" lang="ja-JP" altLang="en-US" smtClean="0"/>
-              <a:t>2026/5/20</a:t>
+              <a:t>2026/7/8</a:t>
             </a:fld>
             <a:endParaRPr kumimoji="1" lang="ja-JP" altLang="en-US"/>
           </a:p>
@@ -2041,7 +2041,7 @@
           <a:p>
             <a:fld id="{F07E596A-3FA7-46C0-A5AB-AD11BEA7438E}" type="datetimeFigureOut">
               <a:rPr kumimoji="1" lang="ja-JP" altLang="en-US" smtClean="0"/>
-              <a:t>2026/5/20</a:t>
+              <a:t>2026/7/8</a:t>
             </a:fld>
             <a:endParaRPr kumimoji="1" lang="ja-JP" altLang="en-US"/>
           </a:p>
@@ -2182,7 +2182,7 @@
           <a:p>
             <a:fld id="{F07E596A-3FA7-46C0-A5AB-AD11BEA7438E}" type="datetimeFigureOut">
               <a:rPr kumimoji="1" lang="ja-JP" altLang="en-US" smtClean="0"/>
-              <a:t>2026/5/20</a:t>
+              <a:t>2026/7/8</a:t>
             </a:fld>
             <a:endParaRPr kumimoji="1" lang="ja-JP" altLang="en-US"/>
           </a:p>
@@ -2295,7 +2295,7 @@
           <a:p>
             <a:fld id="{F07E596A-3FA7-46C0-A5AB-AD11BEA7438E}" type="datetimeFigureOut">
               <a:rPr kumimoji="1" lang="ja-JP" altLang="en-US" smtClean="0"/>
-              <a:t>2026/5/20</a:t>
+              <a:t>2026/7/8</a:t>
             </a:fld>
             <a:endParaRPr kumimoji="1" lang="ja-JP" altLang="en-US"/>
           </a:p>
@@ -2638,7 +2638,7 @@
           <a:p>
             <a:fld id="{F07E596A-3FA7-46C0-A5AB-AD11BEA7438E}" type="datetimeFigureOut">
               <a:rPr kumimoji="1" lang="ja-JP" altLang="en-US" smtClean="0"/>
-              <a:t>2026/5/20</a:t>
+              <a:t>2026/7/8</a:t>
             </a:fld>
             <a:endParaRPr kumimoji="1" lang="ja-JP" altLang="en-US"/>
           </a:p>
@@ -2926,7 +2926,7 @@
           <a:p>
             <a:fld id="{F07E596A-3FA7-46C0-A5AB-AD11BEA7438E}" type="datetimeFigureOut">
               <a:rPr kumimoji="1" lang="ja-JP" altLang="en-US" smtClean="0"/>
-              <a:t>2026/5/20</a:t>
+              <a:t>2026/7/8</a:t>
             </a:fld>
             <a:endParaRPr kumimoji="1" lang="ja-JP" altLang="en-US"/>
           </a:p>
@@ -3199,7 +3199,7 @@
           <a:p>
             <a:fld id="{F07E596A-3FA7-46C0-A5AB-AD11BEA7438E}" type="datetimeFigureOut">
               <a:rPr kumimoji="1" lang="ja-JP" altLang="en-US" smtClean="0"/>
-              <a:t>2026/5/20</a:t>
+              <a:t>2026/7/8</a:t>
             </a:fld>
             <a:endParaRPr kumimoji="1" lang="ja-JP" altLang="en-US"/>
           </a:p>
@@ -3665,7 +3665,11 @@
           <a:bodyPr/>
           <a:lstStyle/>
           <a:p>
-            <a:endParaRPr kumimoji="1" lang="ja-JP" altLang="en-US"/>
+            <a:r>
+              <a:rPr lang="ja-JP" altLang="ja-JP" dirty="0"/>
+              <a:t>鋭意作成中</a:t>
+            </a:r>
+            <a:endParaRPr kumimoji="1" lang="ja-JP" altLang="en-US" dirty="0"/>
           </a:p>
         </p:txBody>
       </p:sp>

--- a/chat-application_仕様書.pptx
+++ b/chat-application_仕様書.pptx
@@ -14,7 +14,8 @@
     <p:sldId id="262" r:id="rId8"/>
     <p:sldId id="263" r:id="rId9"/>
     <p:sldId id="264" r:id="rId10"/>
-    <p:sldId id="265" r:id="rId11"/>
+    <p:sldId id="266" r:id="rId11"/>
+    <p:sldId id="265" r:id="rId12"/>
   </p:sldIdLst>
   <p:sldSz cx="18288000" cy="10287000"/>
   <p:notesSz cx="18288000" cy="10287000"/>
@@ -2134,6 +2135,372 @@
   <p:cSld>
     <p:spTree>
       <p:nvGrpSpPr>
+        <p:cNvPr id="1" name="">
+          <a:extLst>
+            <a:ext uri="{FF2B5EF4-FFF2-40B4-BE49-F238E27FC236}">
+              <a16:creationId xmlns:a16="http://schemas.microsoft.com/office/drawing/2014/main" id="{A23AAA19-CF90-DBBF-0B6E-BA5C38E67B34}"/>
+            </a:ext>
+          </a:extLst>
+        </p:cNvPr>
+        <p:cNvGrpSpPr/>
+        <p:nvPr/>
+      </p:nvGrpSpPr>
+      <p:grpSpPr>
+        <a:xfrm>
+          <a:off x="0" y="0"/>
+          <a:ext cx="0" cy="0"/>
+          <a:chOff x="0" y="0"/>
+          <a:chExt cx="0" cy="0"/>
+        </a:xfrm>
+      </p:grpSpPr>
+      <p:sp>
+        <p:nvSpPr>
+          <p:cNvPr id="2" name="object 2">
+            <a:extLst>
+              <a:ext uri="{FF2B5EF4-FFF2-40B4-BE49-F238E27FC236}">
+                <a16:creationId xmlns:a16="http://schemas.microsoft.com/office/drawing/2014/main" id="{BC061FED-5B33-F5EF-AA70-BB2670B4FE62}"/>
+              </a:ext>
+            </a:extLst>
+          </p:cNvPr>
+          <p:cNvSpPr/>
+          <p:nvPr/>
+        </p:nvSpPr>
+        <p:spPr>
+          <a:xfrm>
+            <a:off x="592876" y="1435700"/>
+            <a:ext cx="2687955" cy="162560"/>
+          </a:xfrm>
+          <a:custGeom>
+            <a:avLst/>
+            <a:gdLst/>
+            <a:ahLst/>
+            <a:cxnLst/>
+            <a:rect l="l" t="t" r="r" b="b"/>
+            <a:pathLst>
+              <a:path w="2687954" h="162559">
+                <a:moveTo>
+                  <a:pt x="0" y="162382"/>
+                </a:moveTo>
+                <a:lnTo>
+                  <a:pt x="50645" y="158341"/>
+                </a:lnTo>
+                <a:lnTo>
+                  <a:pt x="101293" y="154338"/>
+                </a:lnTo>
+                <a:lnTo>
+                  <a:pt x="151944" y="150372"/>
+                </a:lnTo>
+                <a:lnTo>
+                  <a:pt x="202597" y="146444"/>
+                </a:lnTo>
+                <a:lnTo>
+                  <a:pt x="253253" y="142554"/>
+                </a:lnTo>
+                <a:lnTo>
+                  <a:pt x="303912" y="138701"/>
+                </a:lnTo>
+                <a:lnTo>
+                  <a:pt x="354573" y="134886"/>
+                </a:lnTo>
+                <a:lnTo>
+                  <a:pt x="405237" y="131108"/>
+                </a:lnTo>
+                <a:lnTo>
+                  <a:pt x="455903" y="127368"/>
+                </a:lnTo>
+                <a:lnTo>
+                  <a:pt x="506572" y="123666"/>
+                </a:lnTo>
+                <a:lnTo>
+                  <a:pt x="557244" y="120001"/>
+                </a:lnTo>
+                <a:lnTo>
+                  <a:pt x="607918" y="116373"/>
+                </a:lnTo>
+                <a:lnTo>
+                  <a:pt x="658595" y="112784"/>
+                </a:lnTo>
+                <a:lnTo>
+                  <a:pt x="709274" y="109231"/>
+                </a:lnTo>
+                <a:lnTo>
+                  <a:pt x="759956" y="105717"/>
+                </a:lnTo>
+                <a:lnTo>
+                  <a:pt x="810640" y="102240"/>
+                </a:lnTo>
+                <a:lnTo>
+                  <a:pt x="861328" y="98800"/>
+                </a:lnTo>
+                <a:lnTo>
+                  <a:pt x="912017" y="95398"/>
+                </a:lnTo>
+                <a:lnTo>
+                  <a:pt x="962710" y="92034"/>
+                </a:lnTo>
+                <a:lnTo>
+                  <a:pt x="1013405" y="88707"/>
+                </a:lnTo>
+                <a:lnTo>
+                  <a:pt x="1064102" y="85418"/>
+                </a:lnTo>
+                <a:lnTo>
+                  <a:pt x="1114802" y="82166"/>
+                </a:lnTo>
+                <a:lnTo>
+                  <a:pt x="1165505" y="78952"/>
+                </a:lnTo>
+                <a:lnTo>
+                  <a:pt x="1216210" y="75775"/>
+                </a:lnTo>
+                <a:lnTo>
+                  <a:pt x="1266918" y="72636"/>
+                </a:lnTo>
+                <a:lnTo>
+                  <a:pt x="1317629" y="69535"/>
+                </a:lnTo>
+                <a:lnTo>
+                  <a:pt x="1368342" y="66471"/>
+                </a:lnTo>
+                <a:lnTo>
+                  <a:pt x="1419057" y="63445"/>
+                </a:lnTo>
+                <a:lnTo>
+                  <a:pt x="1469776" y="60456"/>
+                </a:lnTo>
+                <a:lnTo>
+                  <a:pt x="1520496" y="57505"/>
+                </a:lnTo>
+                <a:lnTo>
+                  <a:pt x="1571220" y="54592"/>
+                </a:lnTo>
+                <a:lnTo>
+                  <a:pt x="1621946" y="51716"/>
+                </a:lnTo>
+                <a:lnTo>
+                  <a:pt x="1672675" y="48877"/>
+                </a:lnTo>
+                <a:lnTo>
+                  <a:pt x="1723406" y="46077"/>
+                </a:lnTo>
+                <a:lnTo>
+                  <a:pt x="1774140" y="43313"/>
+                </a:lnTo>
+                <a:lnTo>
+                  <a:pt x="1824876" y="40588"/>
+                </a:lnTo>
+                <a:lnTo>
+                  <a:pt x="1875615" y="37900"/>
+                </a:lnTo>
+                <a:lnTo>
+                  <a:pt x="1926356" y="35249"/>
+                </a:lnTo>
+                <a:lnTo>
+                  <a:pt x="1977101" y="32636"/>
+                </a:lnTo>
+                <a:lnTo>
+                  <a:pt x="2027847" y="30061"/>
+                </a:lnTo>
+                <a:lnTo>
+                  <a:pt x="2078597" y="27523"/>
+                </a:lnTo>
+                <a:lnTo>
+                  <a:pt x="2129348" y="25023"/>
+                </a:lnTo>
+                <a:lnTo>
+                  <a:pt x="2180103" y="22560"/>
+                </a:lnTo>
+                <a:lnTo>
+                  <a:pt x="2230860" y="20135"/>
+                </a:lnTo>
+                <a:lnTo>
+                  <a:pt x="2281620" y="17747"/>
+                </a:lnTo>
+                <a:lnTo>
+                  <a:pt x="2332382" y="15397"/>
+                </a:lnTo>
+                <a:lnTo>
+                  <a:pt x="2383147" y="13085"/>
+                </a:lnTo>
+                <a:lnTo>
+                  <a:pt x="2433914" y="10810"/>
+                </a:lnTo>
+                <a:lnTo>
+                  <a:pt x="2484684" y="8573"/>
+                </a:lnTo>
+                <a:lnTo>
+                  <a:pt x="2535456" y="6373"/>
+                </a:lnTo>
+                <a:lnTo>
+                  <a:pt x="2586231" y="4211"/>
+                </a:lnTo>
+                <a:lnTo>
+                  <a:pt x="2637009" y="2086"/>
+                </a:lnTo>
+                <a:lnTo>
+                  <a:pt x="2687789" y="0"/>
+                </a:lnTo>
+              </a:path>
+            </a:pathLst>
+          </a:custGeom>
+          <a:ln w="81191">
+            <a:solidFill>
+              <a:srgbClr val="000000"/>
+            </a:solidFill>
+          </a:ln>
+        </p:spPr>
+        <p:txBody>
+          <a:bodyPr wrap="square" lIns="0" tIns="0" rIns="0" bIns="0" rtlCol="0"/>
+          <a:lstStyle/>
+          <a:p>
+            <a:endParaRPr/>
+          </a:p>
+        </p:txBody>
+      </p:sp>
+      <p:sp>
+        <p:nvSpPr>
+          <p:cNvPr id="3" name="object 3">
+            <a:extLst>
+              <a:ext uri="{FF2B5EF4-FFF2-40B4-BE49-F238E27FC236}">
+                <a16:creationId xmlns:a16="http://schemas.microsoft.com/office/drawing/2014/main" id="{0D145419-81B9-D125-AFC9-4AFB33D57A2A}"/>
+              </a:ext>
+            </a:extLst>
+          </p:cNvPr>
+          <p:cNvSpPr/>
+          <p:nvPr/>
+        </p:nvSpPr>
+        <p:spPr>
+          <a:xfrm>
+            <a:off x="1516819" y="1916756"/>
+            <a:ext cx="2729865" cy="55244"/>
+          </a:xfrm>
+          <a:custGeom>
+            <a:avLst/>
+            <a:gdLst/>
+            <a:ahLst/>
+            <a:cxnLst/>
+            <a:rect l="l" t="t" r="r" b="b"/>
+            <a:pathLst>
+              <a:path w="2729865" h="55244">
+                <a:moveTo>
+                  <a:pt x="0" y="54800"/>
+                </a:moveTo>
+                <a:lnTo>
+                  <a:pt x="2729611" y="0"/>
+                </a:lnTo>
+              </a:path>
+            </a:pathLst>
+          </a:custGeom>
+          <a:ln w="81191">
+            <a:solidFill>
+              <a:srgbClr val="000000"/>
+            </a:solidFill>
+          </a:ln>
+        </p:spPr>
+        <p:txBody>
+          <a:bodyPr wrap="square" lIns="0" tIns="0" rIns="0" bIns="0" rtlCol="0"/>
+          <a:lstStyle/>
+          <a:p>
+            <a:endParaRPr/>
+          </a:p>
+        </p:txBody>
+      </p:sp>
+      <p:sp>
+        <p:nvSpPr>
+          <p:cNvPr id="4" name="object 4" descr="$PPTXTitle">
+            <a:extLst>
+              <a:ext uri="{FF2B5EF4-FFF2-40B4-BE49-F238E27FC236}">
+                <a16:creationId xmlns:a16="http://schemas.microsoft.com/office/drawing/2014/main" id="{20A5D88B-00EE-86DC-C8D5-72A4777EB9D6}"/>
+              </a:ext>
+            </a:extLst>
+          </p:cNvPr>
+          <p:cNvSpPr txBox="1">
+            <a:spLocks noGrp="1"/>
+          </p:cNvSpPr>
+          <p:nvPr>
+            <p:ph type="title"/>
+          </p:nvPr>
+        </p:nvSpPr>
+        <p:spPr>
+          <a:prstGeom prst="rect">
+            <a:avLst/>
+          </a:prstGeom>
+        </p:spPr>
+        <p:txBody>
+          <a:bodyPr vert="horz" wrap="square" lIns="0" tIns="13970" rIns="0" bIns="0" rtlCol="0">
+            <a:spAutoFit/>
+          </a:bodyPr>
+          <a:lstStyle/>
+          <a:p>
+            <a:pPr marL="12700">
+              <a:lnSpc>
+                <a:spcPct val="100000"/>
+              </a:lnSpc>
+              <a:spcBef>
+                <a:spcPts val="110"/>
+              </a:spcBef>
+            </a:pPr>
+            <a:r>
+              <a:rPr spc="-15" dirty="0"/>
+              <a:t>参考資料</a:t>
+            </a:r>
+          </a:p>
+        </p:txBody>
+      </p:sp>
+      <p:pic>
+        <p:nvPicPr>
+          <p:cNvPr id="13" name="図 12">
+            <a:extLst>
+              <a:ext uri="{FF2B5EF4-FFF2-40B4-BE49-F238E27FC236}">
+                <a16:creationId xmlns:a16="http://schemas.microsoft.com/office/drawing/2014/main" id="{9B679EDD-65F3-6ED0-A44A-606469B07386}"/>
+              </a:ext>
+            </a:extLst>
+          </p:cNvPr>
+          <p:cNvPicPr>
+            <a:picLocks noChangeAspect="1"/>
+          </p:cNvPicPr>
+          <p:nvPr/>
+        </p:nvPicPr>
+        <p:blipFill>
+          <a:blip r:embed="rId2">
+            <a:extLst>
+              <a:ext uri="{28A0092B-C50C-407E-A947-70E740481C1C}">
+                <a14:useLocalDpi xmlns:a14="http://schemas.microsoft.com/office/drawing/2010/main" val="0"/>
+              </a:ext>
+            </a:extLst>
+          </a:blip>
+          <a:stretch>
+            <a:fillRect/>
+          </a:stretch>
+        </p:blipFill>
+        <p:spPr>
+          <a:xfrm>
+            <a:off x="2590800" y="2159515"/>
+            <a:ext cx="13702987" cy="7376882"/>
+          </a:xfrm>
+          <a:prstGeom prst="rect">
+            <a:avLst/>
+          </a:prstGeom>
+        </p:spPr>
+      </p:pic>
+    </p:spTree>
+    <p:extLst>
+      <p:ext uri="{BB962C8B-B14F-4D97-AF65-F5344CB8AC3E}">
+        <p14:creationId xmlns:p14="http://schemas.microsoft.com/office/powerpoint/2010/main" val="3837186441"/>
+      </p:ext>
+    </p:extLst>
+  </p:cSld>
+  <p:clrMapOvr>
+    <a:masterClrMapping/>
+  </p:clrMapOvr>
+</p:sld>
+</file>
+
+<file path=ppt/slides/slide11.xml><?xml version="1.0" encoding="utf-8"?>
+<p:sld xmlns:a="http://schemas.openxmlformats.org/drawingml/2006/main" xmlns:r="http://schemas.openxmlformats.org/officeDocument/2006/relationships" xmlns:p="http://schemas.openxmlformats.org/presentationml/2006/main">
+  <p:cSld>
+    <p:spTree>
+      <p:nvGrpSpPr>
         <p:cNvPr id="1" name=""/>
         <p:cNvGrpSpPr/>
         <p:nvPr/>
@@ -3860,7 +4227,7 @@
               <a:rPr sz="4000" spc="-5" dirty="0"/>
               <a:t>アカウントを使ったログインに対応</a:t>
             </a:r>
-            <a:endParaRPr sz="4000">
+            <a:endParaRPr sz="4000" dirty="0">
               <a:latin typeface="Arial Narrow"/>
               <a:cs typeface="Arial Narrow"/>
             </a:endParaRPr>
@@ -3874,7 +4241,7 @@
                 <a:spcPts val="1760"/>
               </a:spcBef>
             </a:pPr>
-            <a:endParaRPr sz="4000"/>
+            <a:endParaRPr sz="4000" dirty="0"/>
           </a:p>
           <a:p>
             <a:pPr marL="12700">
@@ -4022,7 +4389,7 @@
         </p:blipFill>
         <p:spPr>
           <a:xfrm>
-            <a:off x="8971284" y="3300196"/>
+            <a:off x="8839200" y="3314700"/>
             <a:ext cx="8703952" cy="3867056"/>
           </a:xfrm>
           <a:prstGeom prst="rect">
